--- a/public/praise-template.pptx
+++ b/public/praise-template.pptx
@@ -9,6 +9,8 @@
     <p:sldId id="258" r:id="rId902"/>
     <p:sldId id="259" r:id="rId903"/>
     <p:sldId id="260" r:id="rId904"/>
+    <p:sldId id="261" r:id="rId905"/>
+    <p:sldId id="262" r:id="rId906"/>
   </p:sldIdLst>
   <p:sldSz cy="6858000" cx="9144000"/>
   <p:notesSz cx="6858000" cy="9144000"/>
@@ -5428,7 +5430,7 @@
                 <a:cs typeface="NanumGothicExtraBold"/>
                 <a:sym typeface="NanumGothicExtraBold"/>
               </a:rPr>
-              <a:t>기도</a:t>
+              <a:t>{{PRAYER_KO}}</a:t>
             </a:r>
             <a:endParaRPr sz="5400">
               <a:solidFill>
@@ -5483,9 +5485,522 @@
                 <a:cs typeface="NanumGothicExtraBold"/>
                 <a:sym typeface="NanumGothicExtraBold"/>
               </a:rPr>
-              <a:t>Prayer</a:t>
+              <a:t>{{PRAYER_EN}}</a:t>
             </a:r>
             <a:endParaRPr sz="5400">
+              <a:solidFill>
+                <a:schemeClr val="lt1"/>
+              </a:solidFill>
+              <a:latin typeface="NanumGothicExtraBold"/>
+              <a:ea typeface="NanumGothicExtraBold"/>
+              <a:cs typeface="NanumGothicExtraBold"/>
+              <a:sym typeface="NanumGothicExtraBold"/>
+            </a:endParaRPr>
+          </a:p>
+        </p:txBody>
+      </p:sp>
+    </p:spTree>
+  </p:cSld>
+  <p:clrMapOvr>
+    <a:masterClrMapping/>
+  </p:clrMapOvr>
+</p:sld>
+</file>
+
+<file path=ppt/slides/slide5.xml><?xml version="1.0" encoding="utf-8"?>
+<p:sld xmlns:a="http://schemas.openxmlformats.org/drawingml/2006/main" xmlns:r="http://schemas.openxmlformats.org/officeDocument/2006/relationships" xmlns:mc="http://schemas.openxmlformats.org/markup-compatibility/2006" xmlns:mv="urn:schemas-microsoft-com:mac:vml" xmlns:p="http://schemas.openxmlformats.org/presentationml/2006/main" xmlns:c="http://schemas.openxmlformats.org/drawingml/2006/chart" xmlns:dgm="http://schemas.openxmlformats.org/drawingml/2006/diagram" xmlns:o="urn:schemas-microsoft-com:office:office" xmlns:v="urn:schemas-microsoft-com:vml" xmlns:pvml="urn:schemas-microsoft-com:office:powerpoint" xmlns:com="http://schemas.openxmlformats.org/drawingml/2006/compatibility" xmlns:p14="http://schemas.microsoft.com/office/powerpoint/2010/main" xmlns:p15="http://schemas.microsoft.com/office/powerpoint/2012/main" xmlns:ahyp="http://schemas.microsoft.com/office/drawing/2018/hyperlinkcolor">
+  <p:cSld>
+    <p:spTree>
+      <p:nvGrpSpPr>
+        <p:cNvPr id="428" name="Shape 428"/>
+        <p:cNvGrpSpPr/>
+        <p:nvPr/>
+      </p:nvGrpSpPr>
+      <p:grpSpPr>
+        <a:xfrm>
+          <a:off x="0" y="0"/>
+          <a:ext cx="0" cy="0"/>
+          <a:chOff x="0" y="0"/>
+          <a:chExt cx="0" cy="0"/>
+        </a:xfrm>
+      </p:grpSpPr>
+      <p:pic>
+        <p:nvPicPr>
+          <p:cNvPr id="429" name="Google Shape;429;p74" title="EM &amp; KM Praise Night Slide (3).png"/>
+          <p:cNvPicPr preferRelativeResize="0"/>
+          <p:nvPr/>
+        </p:nvPicPr>
+        <p:blipFill>
+          <a:blip r:embed="rId3">
+            <a:alphaModFix/>
+          </a:blip>
+          <a:stretch>
+            <a:fillRect/>
+          </a:stretch>
+        </p:blipFill>
+        <p:spPr>
+          <a:xfrm>
+            <a:off x="0" y="0"/>
+            <a:ext cx="9144000" cy="6858000"/>
+          </a:xfrm>
+          <a:prstGeom prst="rect">
+            <a:avLst/>
+          </a:prstGeom>
+          <a:noFill/>
+          <a:ln>
+            <a:noFill/>
+          </a:ln>
+        </p:spPr>
+      </p:pic>
+      <p:sp>
+        <p:nvSpPr>
+          <p:cNvPr id="430" name="Google Shape;430;p74"/>
+          <p:cNvSpPr txBox="1"/>
+          <p:nvPr/>
+        </p:nvSpPr>
+        <p:spPr>
+          <a:xfrm>
+            <a:off x="526350" y="592975"/>
+            <a:ext cx="2529300" cy="861900"/>
+          </a:xfrm>
+          <a:prstGeom prst="rect">
+            <a:avLst/>
+          </a:prstGeom>
+          <a:noFill/>
+          <a:ln>
+            <a:noFill/>
+          </a:ln>
+        </p:spPr>
+        <p:txBody>
+          <a:bodyPr anchorCtr="0" anchor="t" bIns="91425" lIns="91425" spcFirstLastPara="1" rIns="91425" wrap="square" tIns="91425">
+            <a:spAutoFit/>
+          </a:bodyPr>
+          <a:lstStyle/>
+          <a:p>
+            <a:pPr indent="0" lvl="0" marL="0" rtl="0" algn="l">
+              <a:spcBef>
+                <a:spcPts val="0"/>
+              </a:spcBef>
+              <a:spcAft>
+                <a:spcPts val="0"/>
+              </a:spcAft>
+              <a:buNone/>
+            </a:pPr>
+            <a:r>
+              <a:rPr lang="en" sz="4400">
+                <a:solidFill>
+                  <a:schemeClr val="lt1"/>
+                </a:solidFill>
+                <a:latin typeface="NanumGothicExtraBold"/>
+                <a:ea typeface="NanumGothicExtraBold"/>
+                <a:cs typeface="NanumGothicExtraBold"/>
+                <a:sym typeface="NanumGothicExtraBold"/>
+              </a:rPr>
+              <a:t>{{PRAYER_HEADING}}</a:t>
+            </a:r>
+            <a:endParaRPr sz="4400">
+              <a:solidFill>
+                <a:schemeClr val="lt1"/>
+              </a:solidFill>
+              <a:latin typeface="NanumGothicExtraBold"/>
+              <a:ea typeface="NanumGothicExtraBold"/>
+              <a:cs typeface="NanumGothicExtraBold"/>
+              <a:sym typeface="NanumGothicExtraBold"/>
+            </a:endParaRPr>
+          </a:p>
+        </p:txBody>
+      </p:sp>
+      <p:sp>
+        <p:nvSpPr>
+          <p:cNvPr id="431" name="Google Shape;431;p74"/>
+          <p:cNvSpPr txBox="1"/>
+          <p:nvPr/>
+        </p:nvSpPr>
+        <p:spPr>
+          <a:xfrm>
+            <a:off x="526350" y="1858950"/>
+            <a:ext cx="8091300" cy="4266600"/>
+          </a:xfrm>
+          <a:prstGeom prst="rect">
+            <a:avLst/>
+          </a:prstGeom>
+          <a:noFill/>
+          <a:ln>
+            <a:noFill/>
+          </a:ln>
+        </p:spPr>
+        <p:txBody>
+          <a:bodyPr anchorCtr="0" anchor="t" bIns="91425" lIns="91425" spcFirstLastPara="1" rIns="91425" wrap="square" tIns="91425">
+            <a:spAutoFit/>
+          </a:bodyPr>
+          <a:lstStyle/>
+          <a:p>
+            <a:pPr indent="-393700" lvl="0" marL="457200" rtl="0" algn="l">
+              <a:lnSpc>
+                <a:spcPct val="115000"/>
+              </a:lnSpc>
+              <a:spcBef>
+                <a:spcPts val="0"/>
+              </a:spcBef>
+              <a:spcAft>
+                <a:spcPts val="0"/>
+              </a:spcAft>
+              <a:buClr>
+                <a:schemeClr val="lt1"/>
+              </a:buClr>
+              <a:buSzPts val="2600"/>
+              <a:buFont typeface="NanumGothicExtraBold"/>
+              <a:buChar char="-"/>
+            </a:pPr>
+            <a:r>
+              <a:rPr lang="en" sz="2600">
+                <a:solidFill>
+                  <a:schemeClr val="lt1"/>
+                </a:solidFill>
+                <a:latin typeface="NanumGothicExtraBold"/>
+                <a:ea typeface="NanumGothicExtraBold"/>
+                <a:cs typeface="NanumGothicExtraBold"/>
+                <a:sym typeface="NanumGothicExtraBold"/>
+              </a:rPr>
+              <a:t>{{PRAYER_TOPIC}}</a:t>
+            </a:r>
+            <a:endParaRPr sz="2600">
+              <a:solidFill>
+                <a:schemeClr val="lt1"/>
+              </a:solidFill>
+              <a:latin typeface="NanumGothicExtraBold"/>
+              <a:ea typeface="NanumGothicExtraBold"/>
+              <a:cs typeface="NanumGothicExtraBold"/>
+              <a:sym typeface="NanumGothicExtraBold"/>
+            </a:endParaRPr>
+          </a:p>
+        </p:txBody>
+      </p:sp>
+    </p:spTree>
+  </p:cSld>
+  <p:clrMapOvr>
+    <a:masterClrMapping/>
+  </p:clrMapOvr>
+</p:sld>
+</file>
+
+<file path=ppt/slides/slide6.xml><?xml version="1.0" encoding="utf-8"?>
+<p:sld xmlns:a="http://schemas.openxmlformats.org/drawingml/2006/main" xmlns:r="http://schemas.openxmlformats.org/officeDocument/2006/relationships" xmlns:mc="http://schemas.openxmlformats.org/markup-compatibility/2006" xmlns:mv="urn:schemas-microsoft-com:mac:vml" xmlns:p="http://schemas.openxmlformats.org/presentationml/2006/main" xmlns:c="http://schemas.openxmlformats.org/drawingml/2006/chart" xmlns:dgm="http://schemas.openxmlformats.org/drawingml/2006/diagram" xmlns:o="urn:schemas-microsoft-com:office:office" xmlns:v="urn:schemas-microsoft-com:vml" xmlns:pvml="urn:schemas-microsoft-com:office:powerpoint" xmlns:com="http://schemas.openxmlformats.org/drawingml/2006/compatibility" xmlns:p14="http://schemas.microsoft.com/office/powerpoint/2010/main" xmlns:p15="http://schemas.microsoft.com/office/powerpoint/2012/main" xmlns:ahyp="http://schemas.microsoft.com/office/drawing/2018/hyperlinkcolor">
+  <p:cSld>
+    <p:bg>
+      <p:bgPr>
+        <a:blipFill>
+          <a:blip r:embed="rId3">
+            <a:alphaModFix/>
+          </a:blip>
+          <a:stretch>
+            <a:fillRect/>
+          </a:stretch>
+        </a:blipFill>
+      </p:bgPr>
+    </p:bg>
+    <p:spTree>
+      <p:nvGrpSpPr>
+        <p:cNvPr id="364" name="Shape 364"/>
+        <p:cNvGrpSpPr/>
+        <p:nvPr/>
+      </p:nvGrpSpPr>
+      <p:grpSpPr>
+        <a:xfrm>
+          <a:off x="0" y="0"/>
+          <a:ext cx="0" cy="0"/>
+          <a:chOff x="0" y="0"/>
+          <a:chExt cx="0" cy="0"/>
+        </a:xfrm>
+      </p:grpSpPr>
+      <p:sp>
+        <p:nvSpPr>
+          <p:cNvPr id="366" name="Google Shape;366;p66"/>
+          <p:cNvSpPr txBox="1"/>
+          <p:nvPr/>
+        </p:nvSpPr>
+        <p:spPr>
+          <a:xfrm>
+            <a:off x="334000" y="212325"/>
+            <a:ext cx="4315800" cy="738900"/>
+          </a:xfrm>
+          <a:prstGeom prst="rect">
+            <a:avLst/>
+          </a:prstGeom>
+          <a:noFill/>
+          <a:ln>
+            <a:noFill/>
+          </a:ln>
+        </p:spPr>
+        <p:txBody>
+          <a:bodyPr anchorCtr="0" anchor="t" bIns="45700" lIns="91425" spcFirstLastPara="1" rIns="91425" wrap="square" tIns="45700">
+            <a:spAutoFit/>
+          </a:bodyPr>
+          <a:lstStyle/>
+          <a:p>
+            <a:pPr indent="0" lvl="0" marL="0" rtl="0" algn="l">
+              <a:spcBef>
+                <a:spcPts val="0"/>
+              </a:spcBef>
+              <a:spcAft>
+                <a:spcPts val="0"/>
+              </a:spcAft>
+              <a:buClr>
+                <a:schemeClr val="dk1"/>
+              </a:buClr>
+              <a:buSzPts val="1100"/>
+              <a:buFont typeface="Arial"/>
+              <a:buNone/>
+            </a:pPr>
+            <a:r>
+              <a:rPr lang="en" sz="2100">
+                <a:solidFill>
+                  <a:schemeClr val="lt1"/>
+                </a:solidFill>
+                <a:latin typeface="NanumGothicExtraBold"/>
+                <a:ea typeface="NanumGothicExtraBold"/>
+                <a:cs typeface="NanumGothicExtraBold"/>
+                <a:sym typeface="NanumGothicExtraBold"/>
+              </a:rPr>
+              <a:t>{{PASSAGE_KO}}</a:t>
+            </a:r>
+            <a:endParaRPr sz="2100">
+              <a:solidFill>
+                <a:schemeClr val="lt1"/>
+              </a:solidFill>
+              <a:latin typeface="NanumGothicExtraBold"/>
+              <a:ea typeface="NanumGothicExtraBold"/>
+              <a:cs typeface="NanumGothicExtraBold"/>
+              <a:sym typeface="NanumGothicExtraBold"/>
+            </a:endParaRPr>
+          </a:p>
+          <a:p>
+            <a:pPr indent="0" lvl="0" marL="0" rtl="0" algn="l">
+              <a:spcBef>
+                <a:spcPts val="0"/>
+              </a:spcBef>
+              <a:spcAft>
+                <a:spcPts val="0"/>
+              </a:spcAft>
+              <a:buClr>
+                <a:schemeClr val="dk1"/>
+              </a:buClr>
+              <a:buSzPts val="1100"/>
+              <a:buFont typeface="Arial"/>
+              <a:buNone/>
+            </a:pPr>
+            <a:r>
+              <a:rPr lang="en" sz="2100">
+                <a:solidFill>
+                  <a:schemeClr val="lt1"/>
+                </a:solidFill>
+                <a:latin typeface="NanumGothicExtraBold"/>
+                <a:ea typeface="NanumGothicExtraBold"/>
+                <a:cs typeface="NanumGothicExtraBold"/>
+                <a:sym typeface="NanumGothicExtraBold"/>
+              </a:rPr>
+              <a:t>{{PASSAGE_EN}}</a:t>
+            </a:r>
+            <a:endParaRPr sz="2100">
+              <a:solidFill>
+                <a:schemeClr val="lt1"/>
+              </a:solidFill>
+              <a:latin typeface="NanumGothicExtraBold"/>
+              <a:ea typeface="NanumGothicExtraBold"/>
+              <a:cs typeface="NanumGothicExtraBold"/>
+              <a:sym typeface="NanumGothicExtraBold"/>
+            </a:endParaRPr>
+          </a:p>
+        </p:txBody>
+      </p:sp>
+      <p:sp>
+        <p:nvSpPr>
+          <p:cNvPr id="367" name="Google Shape;367;p66"/>
+          <p:cNvSpPr txBox="1"/>
+          <p:nvPr/>
+        </p:nvSpPr>
+        <p:spPr>
+          <a:xfrm>
+            <a:off x="334000" y="1582125"/>
+            <a:ext cx="8607900" cy="1957800"/>
+          </a:xfrm>
+          <a:prstGeom prst="rect">
+            <a:avLst/>
+          </a:prstGeom>
+          <a:noFill/>
+          <a:ln>
+            <a:noFill/>
+          </a:ln>
+        </p:spPr>
+        <p:txBody>
+          <a:bodyPr anchorCtr="0" anchor="t" bIns="45700" lIns="91425" spcFirstLastPara="1" rIns="91425" wrap="square" tIns="45700">
+            <a:spAutoFit/>
+          </a:bodyPr>
+          <a:lstStyle/>
+          <a:p>
+            <a:pPr indent="0" lvl="0" marL="0" rtl="0" algn="l">
+              <a:lnSpc>
+                <a:spcPct val="115000"/>
+              </a:lnSpc>
+              <a:spcBef>
+                <a:spcPts val="0"/>
+              </a:spcBef>
+              <a:spcAft>
+                <a:spcPts val="0"/>
+              </a:spcAft>
+              <a:buClr>
+                <a:schemeClr val="dk1"/>
+              </a:buClr>
+              <a:buSzPts val="1100"/>
+              <a:buFont typeface="Arial"/>
+              <a:buNone/>
+            </a:pPr>
+            <a:r>
+              <a:rPr lang="en" sz="3000">
+                <a:solidFill>
+                  <a:schemeClr val="lt1"/>
+                </a:solidFill>
+                <a:latin typeface="NanumGothicExtraBold"/>
+                <a:ea typeface="NanumGothicExtraBold"/>
+                <a:cs typeface="NanumGothicExtraBold"/>
+                <a:sym typeface="NanumGothicExtraBold"/>
+              </a:rPr>
+              <a:t>{{VERSE_REF_KO}}</a:t>
+            </a:r>
+            <a:endParaRPr sz="3000">
+              <a:solidFill>
+                <a:schemeClr val="lt1"/>
+              </a:solidFill>
+              <a:latin typeface="NanumGothicExtraBold"/>
+              <a:ea typeface="NanumGothicExtraBold"/>
+              <a:cs typeface="NanumGothicExtraBold"/>
+              <a:sym typeface="NanumGothicExtraBold"/>
+            </a:endParaRPr>
+          </a:p>
+          <a:p>
+            <a:pPr indent="0" lvl="0" marL="0" rtl="0" algn="l">
+              <a:lnSpc>
+                <a:spcPct val="115000"/>
+              </a:lnSpc>
+              <a:spcBef>
+                <a:spcPts val="900"/>
+              </a:spcBef>
+              <a:spcAft>
+                <a:spcPts val="900"/>
+              </a:spcAft>
+              <a:buNone/>
+            </a:pPr>
+            <a:r>
+              <a:rPr lang="en" sz="2400">
+                <a:solidFill>
+                  <a:schemeClr val="lt1"/>
+                </a:solidFill>
+                <a:latin typeface="NanumGothicExtraBold"/>
+                <a:ea typeface="NanumGothicExtraBold"/>
+                <a:cs typeface="NanumGothicExtraBold"/>
+                <a:sym typeface="NanumGothicExtraBold"/>
+              </a:rPr>
+              <a:t>{{VERSE_KO}}</a:t>
+            </a:r>
+            <a:endParaRPr sz="2400">
+              <a:solidFill>
+                <a:schemeClr val="lt1"/>
+              </a:solidFill>
+              <a:latin typeface="NanumGothicExtraBold"/>
+              <a:ea typeface="NanumGothicExtraBold"/>
+              <a:cs typeface="NanumGothicExtraBold"/>
+              <a:sym typeface="NanumGothicExtraBold"/>
+            </a:endParaRPr>
+          </a:p>
+        </p:txBody>
+      </p:sp>
+      <p:sp>
+        <p:nvSpPr>
+          <p:cNvPr id="368" name="Google Shape;368;p66"/>
+          <p:cNvSpPr txBox="1"/>
+          <p:nvPr/>
+        </p:nvSpPr>
+        <p:spPr>
+          <a:xfrm>
+            <a:off x="370500" y="4176596"/>
+            <a:ext cx="8403000" cy="2313300"/>
+          </a:xfrm>
+          <a:prstGeom prst="rect">
+            <a:avLst/>
+          </a:prstGeom>
+          <a:noFill/>
+          <a:ln>
+            <a:noFill/>
+          </a:ln>
+        </p:spPr>
+        <p:txBody>
+          <a:bodyPr anchorCtr="0" anchor="t" bIns="45700" lIns="91425" spcFirstLastPara="1" rIns="91425" wrap="square" tIns="45700">
+            <a:spAutoFit/>
+          </a:bodyPr>
+          <a:lstStyle/>
+          <a:p>
+            <a:pPr indent="0" lvl="0" marL="0" rtl="0" algn="l">
+              <a:spcBef>
+                <a:spcPts val="0"/>
+              </a:spcBef>
+              <a:spcAft>
+                <a:spcPts val="0"/>
+              </a:spcAft>
+              <a:buClr>
+                <a:schemeClr val="dk1"/>
+              </a:buClr>
+              <a:buSzPts val="1100"/>
+              <a:buFont typeface="Arial"/>
+              <a:buNone/>
+            </a:pPr>
+            <a:r>
+              <a:rPr lang="en" sz="3000">
+                <a:solidFill>
+                  <a:schemeClr val="lt1"/>
+                </a:solidFill>
+                <a:latin typeface="NanumGothicExtraBold"/>
+                <a:ea typeface="NanumGothicExtraBold"/>
+                <a:cs typeface="NanumGothicExtraBold"/>
+                <a:sym typeface="NanumGothicExtraBold"/>
+              </a:rPr>
+              <a:t>{{VERSE_REF_EN}}</a:t>
+            </a:r>
+            <a:endParaRPr sz="3000">
+              <a:solidFill>
+                <a:schemeClr val="lt1"/>
+              </a:solidFill>
+              <a:latin typeface="NanumGothicExtraBold"/>
+              <a:ea typeface="NanumGothicExtraBold"/>
+              <a:cs typeface="NanumGothicExtraBold"/>
+              <a:sym typeface="NanumGothicExtraBold"/>
+            </a:endParaRPr>
+          </a:p>
+          <a:p>
+            <a:pPr indent="0" lvl="0" marL="0" rtl="0" algn="l">
+              <a:lnSpc>
+                <a:spcPct val="115000"/>
+              </a:lnSpc>
+              <a:spcBef>
+                <a:spcPts val="900"/>
+              </a:spcBef>
+              <a:spcAft>
+                <a:spcPts val="900"/>
+              </a:spcAft>
+              <a:buNone/>
+            </a:pPr>
+            <a:r>
+              <a:rPr lang="en" sz="2400">
+                <a:solidFill>
+                  <a:schemeClr val="lt1"/>
+                </a:solidFill>
+                <a:latin typeface="NanumGothicExtraBold"/>
+                <a:ea typeface="NanumGothicExtraBold"/>
+                <a:cs typeface="NanumGothicExtraBold"/>
+                <a:sym typeface="NanumGothicExtraBold"/>
+              </a:rPr>
+              <a:t>{{VERSE_EN}}</a:t>
+            </a:r>
+            <a:endParaRPr sz="2400">
               <a:solidFill>
                 <a:schemeClr val="lt1"/>
               </a:solidFill>
